--- a/data-eng/decks/w6d3s3.pptx
+++ b/data-eng/decks/w6d3s3.pptx
@@ -3099,7 +3099,7 @@
       <p:grpSpPr/>
       <p:sp>
         <p:nvSpPr>
-          <p:cNvPr id="2" name="Oval 1"/>
+          <p:cNvPr id="2" name="deckgen:decor"/>
           <p:cNvSpPr/>
           <p:nvPr/>
         </p:nvSpPr>
@@ -3129,7 +3129,7 @@
       </p:sp>
       <p:sp>
         <p:nvSpPr>
-          <p:cNvPr id="3" name="Oval 2"/>
+          <p:cNvPr id="3" name="deckgen:decor"/>
           <p:cNvSpPr/>
           <p:nvPr/>
         </p:nvSpPr>
@@ -3159,7 +3159,7 @@
       </p:sp>
       <p:sp>
         <p:nvSpPr>
-          <p:cNvPr id="4" name="Oval 3"/>
+          <p:cNvPr id="4" name="deckgen:decor"/>
           <p:cNvSpPr/>
           <p:nvPr/>
         </p:nvSpPr>
@@ -3189,7 +3189,7 @@
       </p:sp>
       <p:sp>
         <p:nvSpPr>
-          <p:cNvPr id="5" name="Rectangle 4"/>
+          <p:cNvPr id="5" name="deckgen:decor"/>
           <p:cNvSpPr/>
           <p:nvPr/>
         </p:nvSpPr>
@@ -3219,7 +3219,7 @@
       </p:sp>
       <p:sp>
         <p:nvSpPr>
-          <p:cNvPr id="6" name="Oval 5"/>
+          <p:cNvPr id="6" name="deckgen:decor"/>
           <p:cNvSpPr/>
           <p:nvPr/>
         </p:nvSpPr>
@@ -3249,7 +3249,7 @@
       </p:sp>
       <p:sp>
         <p:nvSpPr>
-          <p:cNvPr id="7" name="Oval 6"/>
+          <p:cNvPr id="7" name="deckgen:decor"/>
           <p:cNvSpPr/>
           <p:nvPr/>
         </p:nvSpPr>
@@ -3279,7 +3279,7 @@
       </p:sp>
       <p:sp>
         <p:nvSpPr>
-          <p:cNvPr id="8" name="Oval 7"/>
+          <p:cNvPr id="8" name="deckgen:decor"/>
           <p:cNvSpPr/>
           <p:nvPr/>
         </p:nvSpPr>
@@ -3309,7 +3309,7 @@
       </p:sp>
       <p:sp>
         <p:nvSpPr>
-          <p:cNvPr id="9" name="Oval 8"/>
+          <p:cNvPr id="9" name="deckgen:decor"/>
           <p:cNvSpPr/>
           <p:nvPr/>
         </p:nvSpPr>
@@ -3339,7 +3339,7 @@
       </p:sp>
       <p:sp>
         <p:nvSpPr>
-          <p:cNvPr id="10" name="Rectangle 9"/>
+          <p:cNvPr id="10" name="deckgen:decor"/>
           <p:cNvSpPr/>
           <p:nvPr/>
         </p:nvSpPr>
@@ -3599,7 +3599,7 @@
       <p:grpSpPr/>
       <p:sp>
         <p:nvSpPr>
-          <p:cNvPr id="2" name="Oval 1"/>
+          <p:cNvPr id="2" name="deckgen:decor"/>
           <p:cNvSpPr/>
           <p:nvPr/>
         </p:nvSpPr>
@@ -3629,7 +3629,7 @@
       </p:sp>
       <p:sp>
         <p:nvSpPr>
-          <p:cNvPr id="3" name="Oval 2"/>
+          <p:cNvPr id="3" name="deckgen:decor"/>
           <p:cNvSpPr/>
           <p:nvPr/>
         </p:nvSpPr>
@@ -3852,7 +3852,7 @@
         </p:nvSpPr>
         <p:spPr>
           <a:xfrm>
-            <a:off x="1428750" y="5486400"/>
+            <a:off x="1428750" y="5476875"/>
             <a:ext cx="419100" cy="381000"/>
           </a:xfrm>
           <a:prstGeom prst="rect">
@@ -3893,7 +3893,7 @@
         </p:nvSpPr>
         <p:spPr>
           <a:xfrm>
-            <a:off x="1905000" y="5486400"/>
+            <a:off x="1905000" y="5476875"/>
             <a:ext cx="6724650" cy="381000"/>
           </a:xfrm>
           <a:prstGeom prst="rect">
@@ -3968,7 +3968,7 @@
         </p:nvSpPr>
         <p:spPr>
           <a:xfrm>
-            <a:off x="9658350" y="5486400"/>
+            <a:off x="9658350" y="5476875"/>
             <a:ext cx="419100" cy="381000"/>
           </a:xfrm>
           <a:prstGeom prst="rect">
@@ -4009,7 +4009,7 @@
         </p:nvSpPr>
         <p:spPr>
           <a:xfrm>
-            <a:off x="10134600" y="5486400"/>
+            <a:off x="10134600" y="5476875"/>
             <a:ext cx="6724650" cy="381000"/>
           </a:xfrm>
           <a:prstGeom prst="rect">
@@ -4084,7 +4084,7 @@
         </p:nvSpPr>
         <p:spPr>
           <a:xfrm>
-            <a:off x="1428750" y="6515100"/>
+            <a:off x="1428750" y="6505575"/>
             <a:ext cx="419100" cy="381000"/>
           </a:xfrm>
           <a:prstGeom prst="rect">
@@ -4125,7 +4125,7 @@
         </p:nvSpPr>
         <p:spPr>
           <a:xfrm>
-            <a:off x="1905000" y="6515100"/>
+            <a:off x="1905000" y="6505575"/>
             <a:ext cx="6724650" cy="381000"/>
           </a:xfrm>
           <a:prstGeom prst="rect">
@@ -4200,7 +4200,7 @@
         </p:nvSpPr>
         <p:spPr>
           <a:xfrm>
-            <a:off x="9658350" y="6515100"/>
+            <a:off x="9658350" y="6505575"/>
             <a:ext cx="419100" cy="381000"/>
           </a:xfrm>
           <a:prstGeom prst="rect">
@@ -4241,7 +4241,7 @@
         </p:nvSpPr>
         <p:spPr>
           <a:xfrm>
-            <a:off x="10134600" y="6515100"/>
+            <a:off x="10134600" y="6505575"/>
             <a:ext cx="6724650" cy="381000"/>
           </a:xfrm>
           <a:prstGeom prst="rect">
@@ -4406,7 +4406,7 @@
       <p:grpSpPr/>
       <p:sp>
         <p:nvSpPr>
-          <p:cNvPr id="2" name="Oval 1"/>
+          <p:cNvPr id="2" name="deckgen:decor"/>
           <p:cNvSpPr/>
           <p:nvPr/>
         </p:nvSpPr>
@@ -4436,7 +4436,7 @@
       </p:sp>
       <p:sp>
         <p:nvSpPr>
-          <p:cNvPr id="3" name="Oval 2"/>
+          <p:cNvPr id="3" name="deckgen:decor"/>
           <p:cNvSpPr/>
           <p:nvPr/>
         </p:nvSpPr>
@@ -4466,7 +4466,7 @@
       </p:sp>
       <p:sp>
         <p:nvSpPr>
-          <p:cNvPr id="4" name="Oval 3"/>
+          <p:cNvPr id="4" name="deckgen:decor"/>
           <p:cNvSpPr/>
           <p:nvPr/>
         </p:nvSpPr>
@@ -5397,7 +5397,7 @@
       <p:grpSpPr/>
       <p:sp>
         <p:nvSpPr>
-          <p:cNvPr id="2" name="Oval 1"/>
+          <p:cNvPr id="2" name="deckgen:decor"/>
           <p:cNvSpPr/>
           <p:nvPr/>
         </p:nvSpPr>
@@ -5427,7 +5427,7 @@
       </p:sp>
       <p:sp>
         <p:nvSpPr>
-          <p:cNvPr id="3" name="Oval 2"/>
+          <p:cNvPr id="3" name="deckgen:decor"/>
           <p:cNvSpPr/>
           <p:nvPr/>
         </p:nvSpPr>
@@ -5457,7 +5457,7 @@
       </p:sp>
       <p:sp>
         <p:nvSpPr>
-          <p:cNvPr id="4" name="Oval 3"/>
+          <p:cNvPr id="4" name="deckgen:decor"/>
           <p:cNvSpPr/>
           <p:nvPr/>
         </p:nvSpPr>
@@ -6459,7 +6459,7 @@
       <p:grpSpPr/>
       <p:sp>
         <p:nvSpPr>
-          <p:cNvPr id="2" name="Oval 1"/>
+          <p:cNvPr id="2" name="deckgen:decor"/>
           <p:cNvSpPr/>
           <p:nvPr/>
         </p:nvSpPr>
@@ -6489,7 +6489,7 @@
       </p:sp>
       <p:sp>
         <p:nvSpPr>
-          <p:cNvPr id="3" name="Oval 2"/>
+          <p:cNvPr id="3" name="deckgen:decor"/>
           <p:cNvSpPr/>
           <p:nvPr/>
         </p:nvSpPr>
@@ -6519,7 +6519,7 @@
       </p:sp>
       <p:sp>
         <p:nvSpPr>
-          <p:cNvPr id="4" name="Oval 3"/>
+          <p:cNvPr id="4" name="deckgen:decor"/>
           <p:cNvSpPr/>
           <p:nvPr/>
         </p:nvSpPr>
@@ -8258,7 +8258,7 @@
                 <a:ea typeface="Pretendard"/>
                 <a:cs typeface="Pretendard"/>
               </a:rPr>
-              <a:t>producer.py · consumer.py 를 옆 사람과 바꿔 보며 이 여섯 줄이 있는지 확인해 보세요</a:t>
+              <a:t>producer.py · consumer.py 를 열어 이 여섯 줄이 있는지 확인해 보세요</a:t>
             </a:r>
           </a:p>
         </p:txBody>
@@ -8395,7 +8395,7 @@
       <p:grpSpPr/>
       <p:sp>
         <p:nvSpPr>
-          <p:cNvPr id="2" name="Oval 1"/>
+          <p:cNvPr id="2" name="deckgen:decor"/>
           <p:cNvSpPr/>
           <p:nvPr/>
         </p:nvSpPr>
@@ -8425,7 +8425,7 @@
       </p:sp>
       <p:sp>
         <p:nvSpPr>
-          <p:cNvPr id="3" name="Oval 2"/>
+          <p:cNvPr id="3" name="deckgen:decor"/>
           <p:cNvSpPr/>
           <p:nvPr/>
         </p:nvSpPr>
@@ -8455,7 +8455,7 @@
       </p:sp>
       <p:sp>
         <p:nvSpPr>
-          <p:cNvPr id="4" name="Oval 3"/>
+          <p:cNvPr id="4" name="deckgen:decor"/>
           <p:cNvSpPr/>
           <p:nvPr/>
         </p:nvSpPr>
@@ -9895,7 +9895,7 @@
       <p:grpSpPr/>
       <p:sp>
         <p:nvSpPr>
-          <p:cNvPr id="2" name="Oval 1"/>
+          <p:cNvPr id="2" name="deckgen:decor"/>
           <p:cNvSpPr/>
           <p:nvPr/>
         </p:nvSpPr>
@@ -9925,7 +9925,7 @@
       </p:sp>
       <p:sp>
         <p:nvSpPr>
-          <p:cNvPr id="3" name="Oval 2"/>
+          <p:cNvPr id="3" name="deckgen:decor"/>
           <p:cNvSpPr/>
           <p:nvPr/>
         </p:nvSpPr>
@@ -9955,7 +9955,7 @@
       </p:sp>
       <p:sp>
         <p:nvSpPr>
-          <p:cNvPr id="4" name="Oval 3"/>
+          <p:cNvPr id="4" name="deckgen:decor"/>
           <p:cNvSpPr/>
           <p:nvPr/>
         </p:nvSpPr>
@@ -10396,7 +10396,7 @@
                 <a:ea typeface="Pretendard"/>
                 <a:cs typeface="Pretendard"/>
               </a:rPr>
-              <a:t>메시지가 일부 없음</a:t>
+              <a:t>일부(또는 전부) 없음</a:t>
             </a:r>
           </a:p>
         </p:txBody>
@@ -11561,7 +11561,7 @@
       <p:grpSpPr/>
       <p:sp>
         <p:nvSpPr>
-          <p:cNvPr id="2" name="Oval 1"/>
+          <p:cNvPr id="2" name="deckgen:decor"/>
           <p:cNvSpPr/>
           <p:nvPr/>
         </p:nvSpPr>
@@ -11591,7 +11591,7 @@
       </p:sp>
       <p:sp>
         <p:nvSpPr>
-          <p:cNvPr id="3" name="Oval 2"/>
+          <p:cNvPr id="3" name="deckgen:decor"/>
           <p:cNvSpPr/>
           <p:nvPr/>
         </p:nvSpPr>
@@ -11621,7 +11621,7 @@
       </p:sp>
       <p:sp>
         <p:nvSpPr>
-          <p:cNvPr id="4" name="Oval 3"/>
+          <p:cNvPr id="4" name="deckgen:decor"/>
           <p:cNvSpPr/>
           <p:nvPr/>
         </p:nvSpPr>
@@ -12681,7 +12681,7 @@
       <p:grpSpPr/>
       <p:sp>
         <p:nvSpPr>
-          <p:cNvPr id="2" name="Oval 1"/>
+          <p:cNvPr id="2" name="deckgen:decor"/>
           <p:cNvSpPr/>
           <p:nvPr/>
         </p:nvSpPr>
@@ -12711,7 +12711,7 @@
       </p:sp>
       <p:sp>
         <p:nvSpPr>
-          <p:cNvPr id="3" name="Oval 2"/>
+          <p:cNvPr id="3" name="deckgen:decor"/>
           <p:cNvSpPr/>
           <p:nvPr/>
         </p:nvSpPr>
@@ -12741,7 +12741,7 @@
       </p:sp>
       <p:sp>
         <p:nvSpPr>
-          <p:cNvPr id="4" name="Oval 3"/>
+          <p:cNvPr id="4" name="deckgen:decor"/>
           <p:cNvSpPr/>
           <p:nvPr/>
         </p:nvSpPr>
@@ -13708,7 +13708,7 @@
       <p:grpSpPr/>
       <p:sp>
         <p:nvSpPr>
-          <p:cNvPr id="2" name="Oval 1"/>
+          <p:cNvPr id="2" name="deckgen:decor"/>
           <p:cNvSpPr/>
           <p:nvPr/>
         </p:nvSpPr>
@@ -13738,7 +13738,7 @@
       </p:sp>
       <p:sp>
         <p:nvSpPr>
-          <p:cNvPr id="3" name="Oval 2"/>
+          <p:cNvPr id="3" name="deckgen:decor"/>
           <p:cNvSpPr/>
           <p:nvPr/>
         </p:nvSpPr>
@@ -13768,7 +13768,7 @@
       </p:sp>
       <p:sp>
         <p:nvSpPr>
-          <p:cNvPr id="4" name="Oval 3"/>
+          <p:cNvPr id="4" name="deckgen:decor"/>
           <p:cNvSpPr/>
           <p:nvPr/>
         </p:nvSpPr>
@@ -13974,7 +13974,7 @@
       </p:sp>
       <p:sp>
         <p:nvSpPr>
-          <p:cNvPr id="10" name="TextBox 9"/>
+          <p:cNvPr id="10" name="deckgen:ornament"/>
           <p:cNvSpPr txBox="1"/>
           <p:nvPr/>
         </p:nvSpPr>
@@ -14159,7 +14159,7 @@
       </p:sp>
       <p:sp>
         <p:nvSpPr>
-          <p:cNvPr id="14" name="TextBox 13"/>
+          <p:cNvPr id="14" name="deckgen:ornament"/>
           <p:cNvSpPr txBox="1"/>
           <p:nvPr/>
         </p:nvSpPr>
@@ -14344,7 +14344,7 @@
       </p:sp>
       <p:sp>
         <p:nvSpPr>
-          <p:cNvPr id="18" name="TextBox 17"/>
+          <p:cNvPr id="18" name="deckgen:ornament"/>
           <p:cNvSpPr txBox="1"/>
           <p:nvPr/>
         </p:nvSpPr>
